--- a/备选资产/结构图/中心辐射关系-001/example.pptx
+++ b/备选资产/结构图/中心辐射关系-001/example.pptx
@@ -2,13 +2,13 @@
 <file path=ppt/presentation.xml><?xml version="1.0" encoding="utf-8"?>
 <p:presentation xmlns:p="http://schemas.openxmlformats.org/presentationml/2006/main">
   <p:sldMasterIdLst>
-    <p:sldMasterId xmlns:r="http://schemas.openxmlformats.org/officeDocument/2006/relationships" id="2147483648" r:id="R705eff43a689490d"/>
+    <p:sldMasterId xmlns:r="http://schemas.openxmlformats.org/officeDocument/2006/relationships" id="2147483648" r:id="R20d1ee17c98f49e3"/>
   </p:sldMasterIdLst>
   <p:notesMasterIdLst>
-    <p:notesMasterId xmlns:r="http://schemas.openxmlformats.org/officeDocument/2006/relationships" r:id="R6c4c1d4f47d6494f"/>
+    <p:notesMasterId xmlns:r="http://schemas.openxmlformats.org/officeDocument/2006/relationships" r:id="Refe6eb97303a41cf"/>
   </p:notesMasterIdLst>
   <p:sldIdLst>
-    <p:sldId xmlns:r="http://schemas.openxmlformats.org/officeDocument/2006/relationships" id="256" r:id="Rce68496e90e9496c"/>
+    <p:sldId xmlns:r="http://schemas.openxmlformats.org/officeDocument/2006/relationships" id="256" r:id="R9d1ed0b5f61848e6"/>
   </p:sldIdLst>
   <p:sldSz cx="12192000" cy="6858000"/>
   <p:notesSz cx="6858000" cy="9144000"/>
@@ -506,7 +506,7 @@
   </p:cSld>
   <p:clrMap bg1="lt1" tx1="dk1" bg2="lt2" tx2="dk2" accent1="accent1" accent2="accent2" accent3="accent3" accent4="accent4" accent5="accent5" accent6="accent6" hlink="hlink" folHlink="folHlink"/>
   <p:sldLayoutIdLst>
-    <p:sldLayoutId xmlns:r="http://schemas.openxmlformats.org/officeDocument/2006/relationships" id="2147483649" r:id="R7109ba72e1354bfe"/>
+    <p:sldLayoutId xmlns:r="http://schemas.openxmlformats.org/officeDocument/2006/relationships" id="2147483649" r:id="R09b314780dc043cc"/>
   </p:sldLayoutIdLst>
   <p:txStyles>
     <p:titleStyle>
@@ -1057,7 +1057,7 @@
           <p:cNvPr id="22" name="">
             <a:extLst xmlns:a="http://schemas.openxmlformats.org/drawingml/2006/main">
               <a:ext uri="{FF2B5EF4-FFF2-40B4-BE49-F238E27FC236}">
-                <a16:creationId xmlns:a16="http://schemas.microsoft.com/office/drawing/2014/main" id="{97F376F6-D27E-4E78-B86E-8270B835294A}"/>
+                <a16:creationId xmlns:a16="http://schemas.microsoft.com/office/drawing/2014/main" id="{C49EE86E-E62B-4EDD-8B6E-D6682649D4CF}"/>
               </a:ext>
             </a:extLst>
           </p:cNvPr>
@@ -1115,7 +1115,7 @@
           <p:cNvPr id="2" name="">
             <a:extLst xmlns:a="http://schemas.openxmlformats.org/drawingml/2006/main">
               <a:ext uri="{FF2B5EF4-FFF2-40B4-BE49-F238E27FC236}">
-                <a16:creationId xmlns:a16="http://schemas.microsoft.com/office/drawing/2014/main" id="{59B36D1B-57EF-4E33-9821-8C16BF580C4F}"/>
+                <a16:creationId xmlns:a16="http://schemas.microsoft.com/office/drawing/2014/main" id="{6A4507EE-3CFF-490D-953E-AA9FF3ED0E4D}"/>
               </a:ext>
             </a:extLst>
           </p:cNvPr>
@@ -1163,7 +1163,7 @@
                 <a:ea typeface="Microsoft YaHei"/>
                 <a:cs typeface="Microsoft YaHei"/>
               </a:rPr>
-              <a:t>中心辐射</a:t>
+              <a:t>中心主题 · 多向展开</a:t>
             </a:r>
           </a:p>
         </p:txBody>
@@ -1173,7 +1173,7 @@
           <p:cNvPr id="3" name="">
             <a:extLst xmlns:a="http://schemas.openxmlformats.org/drawingml/2006/main">
               <a:ext uri="{FF2B5EF4-FFF2-40B4-BE49-F238E27FC236}">
-                <a16:creationId xmlns:a16="http://schemas.microsoft.com/office/drawing/2014/main" id="{4D41BDC2-524F-41FD-9AEF-15978CFA43B2}"/>
+                <a16:creationId xmlns:a16="http://schemas.microsoft.com/office/drawing/2014/main" id="{E0C9CAAB-CA63-4FA0-83ED-A0D6F819EE6E}"/>
               </a:ext>
             </a:extLst>
           </p:cNvPr>
@@ -1184,17 +1184,89 @@
         </p:nvSpPr>
         <p:spPr>
           <a:xfrm xmlns:a="http://schemas.openxmlformats.org/drawingml/2006/main">
-            <a:off x="4905375" y="2476500"/>
-            <a:ext cx="2381250" cy="2381250"/>
+            <a:off x="4400550" y="1971675"/>
+            <a:ext cx="3390900" cy="3390900"/>
           </a:xfrm>
           <a:prstGeom xmlns:a="http://schemas.openxmlformats.org/drawingml/2006/main" prst="ellipse">
             <a:avLst/>
           </a:prstGeom>
           <a:solidFill xmlns:a="http://schemas.openxmlformats.org/drawingml/2006/main">
-            <a:srgbClr val="1677C8"/>
+            <a:srgbClr val="DCEEFF"/>
           </a:solidFill>
           <a:ln xmlns:a="http://schemas.openxmlformats.org/drawingml/2006/main" w="0">
             <a:noFill/>
+            <a:prstDash val="solid"/>
+          </a:ln>
+        </p:spPr>
+      </p:sp>
+      <p:sp>
+        <p:nvSpPr>
+          <p:cNvPr id="4" name="">
+            <a:extLst xmlns:a="http://schemas.openxmlformats.org/drawingml/2006/main">
+              <a:ext uri="{FF2B5EF4-FFF2-40B4-BE49-F238E27FC236}">
+                <a16:creationId xmlns:a16="http://schemas.microsoft.com/office/drawing/2014/main" id="{DBBF5B08-E8E5-4318-866A-3D78C55D551C}"/>
+              </a:ext>
+            </a:extLst>
+          </p:cNvPr>
+          <p:cNvSpPr>
+            <a:spLocks xmlns:a="http://schemas.openxmlformats.org/drawingml/2006/main" noGrp="1"/>
+          </p:cNvSpPr>
+          <p:nvPr/>
+        </p:nvSpPr>
+        <p:spPr>
+          <a:xfrm xmlns:a="http://schemas.openxmlformats.org/drawingml/2006/main">
+            <a:off x="4629150" y="2200275"/>
+            <a:ext cx="2933700" cy="2933700"/>
+          </a:xfrm>
+          <a:prstGeom xmlns:a="http://schemas.openxmlformats.org/drawingml/2006/main" prst="ellipse">
+            <a:avLst/>
+          </a:prstGeom>
+          <a:solidFill xmlns:a="http://schemas.openxmlformats.org/drawingml/2006/main">
+            <a:srgbClr val="FFFFFF"/>
+          </a:solidFill>
+          <a:ln xmlns:a="http://schemas.openxmlformats.org/drawingml/2006/main" w="19050">
+            <a:solidFill>
+              <a:srgbClr val="B7D8F3"/>
+            </a:solidFill>
+            <a:prstDash val="solid"/>
+          </a:ln>
+        </p:spPr>
+        <p:style>
+          <a:lnRef xmlns:a="http://schemas.openxmlformats.org/drawingml/2006/main" idx="0"/>
+          <a:fillRef xmlns:a="http://schemas.openxmlformats.org/drawingml/2006/main" idx="0"/>
+          <a:effectRef xmlns:a="http://schemas.openxmlformats.org/drawingml/2006/main" idx="6"/>
+          <a:fontRef xmlns:a="http://schemas.openxmlformats.org/drawingml/2006/main" idx="major"/>
+        </p:style>
+      </p:sp>
+      <p:sp>
+        <p:nvSpPr>
+          <p:cNvPr id="5" name="">
+            <a:extLst xmlns:a="http://schemas.openxmlformats.org/drawingml/2006/main">
+              <a:ext uri="{FF2B5EF4-FFF2-40B4-BE49-F238E27FC236}">
+                <a16:creationId xmlns:a16="http://schemas.microsoft.com/office/drawing/2014/main" id="{39E3198C-2300-43BB-BC4A-5E2CB91CFDA9}"/>
+              </a:ext>
+            </a:extLst>
+          </p:cNvPr>
+          <p:cNvSpPr>
+            <a:spLocks xmlns:a="http://schemas.openxmlformats.org/drawingml/2006/main" noGrp="1"/>
+          </p:cNvSpPr>
+          <p:nvPr/>
+        </p:nvSpPr>
+        <p:spPr>
+          <a:xfrm xmlns:a="http://schemas.openxmlformats.org/drawingml/2006/main">
+            <a:off x="4857750" y="2428875"/>
+            <a:ext cx="2476500" cy="2476500"/>
+          </a:xfrm>
+          <a:prstGeom xmlns:a="http://schemas.openxmlformats.org/drawingml/2006/main" prst="ellipse">
+            <a:avLst/>
+          </a:prstGeom>
+          <a:solidFill xmlns:a="http://schemas.openxmlformats.org/drawingml/2006/main">
+            <a:srgbClr val="1677C8"/>
+          </a:solidFill>
+          <a:ln xmlns:a="http://schemas.openxmlformats.org/drawingml/2006/main" w="38100">
+            <a:solidFill>
+              <a:srgbClr val="FFFFFF"/>
+            </a:solidFill>
             <a:prstDash val="solid"/>
           </a:ln>
         </p:spPr>
@@ -1211,7 +1283,7 @@
           <a:lstStyle xmlns:a="http://schemas.openxmlformats.org/drawingml/2006/main"/>
           <a:p xmlns:a="http://schemas.openxmlformats.org/drawingml/2006/main">
             <a:pPr algn="ctr">
-              <a:defRPr sz="2250" b="1">
+              <a:defRPr sz="2175" b="1">
                 <a:solidFill>
                   <a:srgbClr val="FFFFFF"/>
                 </a:solidFill>
@@ -1221,7 +1293,7 @@
               </a:defRPr>
             </a:pPr>
             <a:r>
-              <a:rPr sz="2250" b="1">
+              <a:rPr sz="2175" b="1">
                 <a:solidFill>
                   <a:srgbClr val="FFFFFF"/>
                 </a:solidFill>
@@ -1229,17 +1301,17 @@
                 <a:ea typeface="Microsoft YaHei"/>
                 <a:cs typeface="Microsoft YaHei"/>
               </a:rPr>
-              <a:t>核心主题</a:t>
+              <a:t>协同能力</a:t>
             </a:r>
           </a:p>
         </p:txBody>
       </p:sp>
       <p:sp>
         <p:nvSpPr>
-          <p:cNvPr id="4" name="">
+          <p:cNvPr id="6" name="">
             <a:extLst xmlns:a="http://schemas.openxmlformats.org/drawingml/2006/main">
               <a:ext uri="{FF2B5EF4-FFF2-40B4-BE49-F238E27FC236}">
-                <a16:creationId xmlns:a16="http://schemas.microsoft.com/office/drawing/2014/main" id="{CCFA5A1E-4B68-4DEA-9BEE-10F0DB5495EB}"/>
+                <a16:creationId xmlns:a16="http://schemas.microsoft.com/office/drawing/2014/main" id="{3BA8E87F-0208-424F-8296-CF1D4C10B8CD}"/>
               </a:ext>
             </a:extLst>
           </p:cNvPr>
@@ -1250,8 +1322,8 @@
         </p:nvSpPr>
         <p:spPr>
           <a:xfrm xmlns:a="http://schemas.openxmlformats.org/drawingml/2006/main">
-            <a:off x="5600700" y="885825"/>
-            <a:ext cx="990600" cy="990600"/>
+            <a:off x="3638550" y="2552700"/>
+            <a:ext cx="438150" cy="438150"/>
           </a:xfrm>
           <a:prstGeom xmlns:a="http://schemas.openxmlformats.org/drawingml/2006/main" prst="ellipse">
             <a:avLst/>
@@ -1269,383 +1341,9 @@
         <p:style>
           <a:lnRef xmlns:a="http://schemas.openxmlformats.org/drawingml/2006/main" idx="0"/>
           <a:fillRef xmlns:a="http://schemas.openxmlformats.org/drawingml/2006/main" idx="0"/>
-          <a:effectRef xmlns:a="http://schemas.openxmlformats.org/drawingml/2006/main" idx="6"/>
+          <a:effectRef xmlns:a="http://schemas.openxmlformats.org/drawingml/2006/main" idx="4"/>
           <a:fontRef xmlns:a="http://schemas.openxmlformats.org/drawingml/2006/main" idx="major"/>
         </p:style>
-      </p:sp>
-      <p:sp>
-        <p:nvSpPr>
-          <p:cNvPr id="5" name="">
-            <a:extLst xmlns:a="http://schemas.openxmlformats.org/drawingml/2006/main">
-              <a:ext uri="{FF2B5EF4-FFF2-40B4-BE49-F238E27FC236}">
-                <a16:creationId xmlns:a16="http://schemas.microsoft.com/office/drawing/2014/main" id="{0C2879D5-CBCC-4F4C-9DBE-334D9BF02B1E}"/>
-              </a:ext>
-            </a:extLst>
-          </p:cNvPr>
-          <p:cNvSpPr>
-            <a:spLocks xmlns:a="http://schemas.openxmlformats.org/drawingml/2006/main" noGrp="1"/>
-          </p:cNvSpPr>
-          <p:nvPr/>
-        </p:nvSpPr>
-        <p:spPr>
-          <a:xfrm xmlns:a="http://schemas.openxmlformats.org/drawingml/2006/main">
-            <a:off x="7580434" y="2028825"/>
-            <a:ext cx="990600" cy="990600"/>
-          </a:xfrm>
-          <a:prstGeom xmlns:a="http://schemas.openxmlformats.org/drawingml/2006/main" prst="ellipse">
-            <a:avLst/>
-          </a:prstGeom>
-          <a:solidFill xmlns:a="http://schemas.openxmlformats.org/drawingml/2006/main">
-            <a:srgbClr val="00A8D8"/>
-          </a:solidFill>
-          <a:ln xmlns:a="http://schemas.openxmlformats.org/drawingml/2006/main" w="28575">
-            <a:solidFill>
-              <a:srgbClr val="FFFFFF"/>
-            </a:solidFill>
-            <a:prstDash val="solid"/>
-          </a:ln>
-        </p:spPr>
-        <p:style>
-          <a:lnRef xmlns:a="http://schemas.openxmlformats.org/drawingml/2006/main" idx="0"/>
-          <a:fillRef xmlns:a="http://schemas.openxmlformats.org/drawingml/2006/main" idx="0"/>
-          <a:effectRef xmlns:a="http://schemas.openxmlformats.org/drawingml/2006/main" idx="6"/>
-          <a:fontRef xmlns:a="http://schemas.openxmlformats.org/drawingml/2006/main" idx="major"/>
-        </p:style>
-      </p:sp>
-      <p:sp>
-        <p:nvSpPr>
-          <p:cNvPr id="6" name="">
-            <a:extLst xmlns:a="http://schemas.openxmlformats.org/drawingml/2006/main">
-              <a:ext uri="{FF2B5EF4-FFF2-40B4-BE49-F238E27FC236}">
-                <a16:creationId xmlns:a16="http://schemas.microsoft.com/office/drawing/2014/main" id="{1FD36C04-B344-4678-88D1-024821096D31}"/>
-              </a:ext>
-            </a:extLst>
-          </p:cNvPr>
-          <p:cNvSpPr>
-            <a:spLocks xmlns:a="http://schemas.openxmlformats.org/drawingml/2006/main" noGrp="1"/>
-          </p:cNvSpPr>
-          <p:nvPr/>
-        </p:nvSpPr>
-        <p:spPr>
-          <a:xfrm xmlns:a="http://schemas.openxmlformats.org/drawingml/2006/main">
-            <a:off x="7580434" y="4314825"/>
-            <a:ext cx="990600" cy="990600"/>
-          </a:xfrm>
-          <a:prstGeom xmlns:a="http://schemas.openxmlformats.org/drawingml/2006/main" prst="ellipse">
-            <a:avLst/>
-          </a:prstGeom>
-          <a:solidFill xmlns:a="http://schemas.openxmlformats.org/drawingml/2006/main">
-            <a:srgbClr val="14CBD1"/>
-          </a:solidFill>
-          <a:ln xmlns:a="http://schemas.openxmlformats.org/drawingml/2006/main" w="28575">
-            <a:solidFill>
-              <a:srgbClr val="FFFFFF"/>
-            </a:solidFill>
-            <a:prstDash val="solid"/>
-          </a:ln>
-        </p:spPr>
-        <p:style>
-          <a:lnRef xmlns:a="http://schemas.openxmlformats.org/drawingml/2006/main" idx="0"/>
-          <a:fillRef xmlns:a="http://schemas.openxmlformats.org/drawingml/2006/main" idx="0"/>
-          <a:effectRef xmlns:a="http://schemas.openxmlformats.org/drawingml/2006/main" idx="6"/>
-          <a:fontRef xmlns:a="http://schemas.openxmlformats.org/drawingml/2006/main" idx="major"/>
-        </p:style>
-      </p:sp>
-      <p:sp>
-        <p:nvSpPr>
-          <p:cNvPr id="7" name="">
-            <a:extLst xmlns:a="http://schemas.openxmlformats.org/drawingml/2006/main">
-              <a:ext uri="{FF2B5EF4-FFF2-40B4-BE49-F238E27FC236}">
-                <a16:creationId xmlns:a16="http://schemas.microsoft.com/office/drawing/2014/main" id="{13CA47EE-49FB-4A6E-9466-B32315D810FE}"/>
-              </a:ext>
-            </a:extLst>
-          </p:cNvPr>
-          <p:cNvSpPr>
-            <a:spLocks xmlns:a="http://schemas.openxmlformats.org/drawingml/2006/main" noGrp="1"/>
-          </p:cNvSpPr>
-          <p:nvPr/>
-        </p:nvSpPr>
-        <p:spPr>
-          <a:xfrm xmlns:a="http://schemas.openxmlformats.org/drawingml/2006/main">
-            <a:off x="5600700" y="5457825"/>
-            <a:ext cx="990600" cy="990600"/>
-          </a:xfrm>
-          <a:prstGeom xmlns:a="http://schemas.openxmlformats.org/drawingml/2006/main" prst="ellipse">
-            <a:avLst/>
-          </a:prstGeom>
-          <a:solidFill xmlns:a="http://schemas.openxmlformats.org/drawingml/2006/main">
-            <a:srgbClr val="00A8D8"/>
-          </a:solidFill>
-          <a:ln xmlns:a="http://schemas.openxmlformats.org/drawingml/2006/main" w="28575">
-            <a:solidFill>
-              <a:srgbClr val="FFFFFF"/>
-            </a:solidFill>
-            <a:prstDash val="solid"/>
-          </a:ln>
-        </p:spPr>
-        <p:style>
-          <a:lnRef xmlns:a="http://schemas.openxmlformats.org/drawingml/2006/main" idx="0"/>
-          <a:fillRef xmlns:a="http://schemas.openxmlformats.org/drawingml/2006/main" idx="0"/>
-          <a:effectRef xmlns:a="http://schemas.openxmlformats.org/drawingml/2006/main" idx="6"/>
-          <a:fontRef xmlns:a="http://schemas.openxmlformats.org/drawingml/2006/main" idx="major"/>
-        </p:style>
-      </p:sp>
-      <p:sp>
-        <p:nvSpPr>
-          <p:cNvPr id="8" name="">
-            <a:extLst xmlns:a="http://schemas.openxmlformats.org/drawingml/2006/main">
-              <a:ext uri="{FF2B5EF4-FFF2-40B4-BE49-F238E27FC236}">
-                <a16:creationId xmlns:a16="http://schemas.microsoft.com/office/drawing/2014/main" id="{D84A8757-2331-4E31-846C-C4859B40A99A}"/>
-              </a:ext>
-            </a:extLst>
-          </p:cNvPr>
-          <p:cNvSpPr>
-            <a:spLocks xmlns:a="http://schemas.openxmlformats.org/drawingml/2006/main" noGrp="1"/>
-          </p:cNvSpPr>
-          <p:nvPr/>
-        </p:nvSpPr>
-        <p:spPr>
-          <a:xfrm xmlns:a="http://schemas.openxmlformats.org/drawingml/2006/main">
-            <a:off x="3620966" y="4314825"/>
-            <a:ext cx="990600" cy="990600"/>
-          </a:xfrm>
-          <a:prstGeom xmlns:a="http://schemas.openxmlformats.org/drawingml/2006/main" prst="ellipse">
-            <a:avLst/>
-          </a:prstGeom>
-          <a:solidFill xmlns:a="http://schemas.openxmlformats.org/drawingml/2006/main">
-            <a:srgbClr val="14CBD1"/>
-          </a:solidFill>
-          <a:ln xmlns:a="http://schemas.openxmlformats.org/drawingml/2006/main" w="28575">
-            <a:solidFill>
-              <a:srgbClr val="FFFFFF"/>
-            </a:solidFill>
-            <a:prstDash val="solid"/>
-          </a:ln>
-        </p:spPr>
-        <p:style>
-          <a:lnRef xmlns:a="http://schemas.openxmlformats.org/drawingml/2006/main" idx="0"/>
-          <a:fillRef xmlns:a="http://schemas.openxmlformats.org/drawingml/2006/main" idx="0"/>
-          <a:effectRef xmlns:a="http://schemas.openxmlformats.org/drawingml/2006/main" idx="6"/>
-          <a:fontRef xmlns:a="http://schemas.openxmlformats.org/drawingml/2006/main" idx="major"/>
-        </p:style>
-      </p:sp>
-      <p:sp>
-        <p:nvSpPr>
-          <p:cNvPr id="9" name="">
-            <a:extLst xmlns:a="http://schemas.openxmlformats.org/drawingml/2006/main">
-              <a:ext uri="{FF2B5EF4-FFF2-40B4-BE49-F238E27FC236}">
-                <a16:creationId xmlns:a16="http://schemas.microsoft.com/office/drawing/2014/main" id="{37A02434-F4F6-43C3-A250-B94BA74005B5}"/>
-              </a:ext>
-            </a:extLst>
-          </p:cNvPr>
-          <p:cNvSpPr>
-            <a:spLocks xmlns:a="http://schemas.openxmlformats.org/drawingml/2006/main" noGrp="1"/>
-          </p:cNvSpPr>
-          <p:nvPr/>
-        </p:nvSpPr>
-        <p:spPr>
-          <a:xfrm xmlns:a="http://schemas.openxmlformats.org/drawingml/2006/main">
-            <a:off x="3620966" y="2028825"/>
-            <a:ext cx="990600" cy="990600"/>
-          </a:xfrm>
-          <a:prstGeom xmlns:a="http://schemas.openxmlformats.org/drawingml/2006/main" prst="ellipse">
-            <a:avLst/>
-          </a:prstGeom>
-          <a:solidFill xmlns:a="http://schemas.openxmlformats.org/drawingml/2006/main">
-            <a:srgbClr val="00A8D8"/>
-          </a:solidFill>
-          <a:ln xmlns:a="http://schemas.openxmlformats.org/drawingml/2006/main" w="28575">
-            <a:solidFill>
-              <a:srgbClr val="FFFFFF"/>
-            </a:solidFill>
-            <a:prstDash val="solid"/>
-          </a:ln>
-        </p:spPr>
-        <p:style>
-          <a:lnRef xmlns:a="http://schemas.openxmlformats.org/drawingml/2006/main" idx="0"/>
-          <a:fillRef xmlns:a="http://schemas.openxmlformats.org/drawingml/2006/main" idx="0"/>
-          <a:effectRef xmlns:a="http://schemas.openxmlformats.org/drawingml/2006/main" idx="6"/>
-          <a:fontRef xmlns:a="http://schemas.openxmlformats.org/drawingml/2006/main" idx="major"/>
-        </p:style>
-      </p:sp>
-      <p:cxnSp>
-        <p:nvCxnSpPr>
-          <p:cNvPr id="31" name=""/>
-          <p:cNvCxnSpPr>
-            <a:stCxn xmlns:a="http://schemas.openxmlformats.org/drawingml/2006/main" id="3" idx="0"/>
-            <a:endCxn xmlns:a="http://schemas.openxmlformats.org/drawingml/2006/main" id="4" idx="4"/>
-          </p:cNvCxnSpPr>
-          <p:nvPr/>
-        </p:nvCxnSpPr>
-        <p:spPr>
-          <a:xfrm xmlns:a="http://schemas.openxmlformats.org/drawingml/2006/main" flipV="1">
-            <a:off x="6096000" y="1876425"/>
-            <a:ext cx="0" cy="600075"/>
-          </a:xfrm>
-          <a:prstGeom xmlns:a="http://schemas.openxmlformats.org/drawingml/2006/main" prst="straightConnector1">
-            <a:avLst/>
-          </a:prstGeom>
-          <a:ln xmlns:a="http://schemas.openxmlformats.org/drawingml/2006/main" w="19050">
-            <a:solidFill>
-              <a:srgbClr val="C9D5E3"/>
-            </a:solidFill>
-            <a:prstDash val="solid"/>
-          </a:ln>
-        </p:spPr>
-      </p:cxnSp>
-      <p:cxnSp>
-        <p:nvCxnSpPr>
-          <p:cNvPr id="32" name=""/>
-          <p:cNvCxnSpPr>
-            <a:stCxn xmlns:a="http://schemas.openxmlformats.org/drawingml/2006/main" id="3" idx="7"/>
-            <a:endCxn xmlns:a="http://schemas.openxmlformats.org/drawingml/2006/main" id="5" idx="2"/>
-          </p:cNvCxnSpPr>
-          <p:nvPr/>
-        </p:nvCxnSpPr>
-        <p:spPr>
-          <a:xfrm xmlns:a="http://schemas.openxmlformats.org/drawingml/2006/main" flipV="1">
-            <a:off x="6937899" y="2524125"/>
-            <a:ext cx="642535" cy="301101"/>
-          </a:xfrm>
-          <a:prstGeom xmlns:a="http://schemas.openxmlformats.org/drawingml/2006/main" prst="straightConnector1">
-            <a:avLst/>
-          </a:prstGeom>
-          <a:ln xmlns:a="http://schemas.openxmlformats.org/drawingml/2006/main" w="19050">
-            <a:solidFill>
-              <a:srgbClr val="C9D5E3"/>
-            </a:solidFill>
-            <a:prstDash val="solid"/>
-          </a:ln>
-        </p:spPr>
-      </p:cxnSp>
-      <p:cxnSp>
-        <p:nvCxnSpPr>
-          <p:cNvPr id="33" name=""/>
-          <p:cNvCxnSpPr>
-            <a:stCxn xmlns:a="http://schemas.openxmlformats.org/drawingml/2006/main" id="3" idx="5"/>
-            <a:endCxn xmlns:a="http://schemas.openxmlformats.org/drawingml/2006/main" id="6" idx="2"/>
-          </p:cNvCxnSpPr>
-          <p:nvPr/>
-        </p:nvCxnSpPr>
-        <p:spPr>
-          <a:xfrm xmlns:a="http://schemas.openxmlformats.org/drawingml/2006/main">
-            <a:off x="6937899" y="4509024"/>
-            <a:ext cx="642535" cy="301101"/>
-          </a:xfrm>
-          <a:prstGeom xmlns:a="http://schemas.openxmlformats.org/drawingml/2006/main" prst="straightConnector1">
-            <a:avLst/>
-          </a:prstGeom>
-          <a:ln xmlns:a="http://schemas.openxmlformats.org/drawingml/2006/main" w="19050">
-            <a:solidFill>
-              <a:srgbClr val="C9D5E3"/>
-            </a:solidFill>
-            <a:prstDash val="solid"/>
-          </a:ln>
-        </p:spPr>
-      </p:cxnSp>
-      <p:cxnSp>
-        <p:nvCxnSpPr>
-          <p:cNvPr id="34" name=""/>
-          <p:cNvCxnSpPr>
-            <a:stCxn xmlns:a="http://schemas.openxmlformats.org/drawingml/2006/main" id="3" idx="4"/>
-            <a:endCxn xmlns:a="http://schemas.openxmlformats.org/drawingml/2006/main" id="7" idx="0"/>
-          </p:cNvCxnSpPr>
-          <p:nvPr/>
-        </p:nvCxnSpPr>
-        <p:spPr>
-          <a:xfrm xmlns:a="http://schemas.openxmlformats.org/drawingml/2006/main">
-            <a:off x="6096000" y="4857750"/>
-            <a:ext cx="0" cy="600075"/>
-          </a:xfrm>
-          <a:prstGeom xmlns:a="http://schemas.openxmlformats.org/drawingml/2006/main" prst="straightConnector1">
-            <a:avLst/>
-          </a:prstGeom>
-          <a:ln xmlns:a="http://schemas.openxmlformats.org/drawingml/2006/main" w="19050">
-            <a:solidFill>
-              <a:srgbClr val="C9D5E3"/>
-            </a:solidFill>
-            <a:prstDash val="solid"/>
-          </a:ln>
-        </p:spPr>
-      </p:cxnSp>
-      <p:cxnSp>
-        <p:nvCxnSpPr>
-          <p:cNvPr id="35" name=""/>
-          <p:cNvCxnSpPr>
-            <a:stCxn xmlns:a="http://schemas.openxmlformats.org/drawingml/2006/main" id="3" idx="3"/>
-            <a:endCxn xmlns:a="http://schemas.openxmlformats.org/drawingml/2006/main" id="8" idx="6"/>
-          </p:cNvCxnSpPr>
-          <p:nvPr/>
-        </p:nvCxnSpPr>
-        <p:spPr>
-          <a:xfrm xmlns:a="http://schemas.openxmlformats.org/drawingml/2006/main" flipH="1">
-            <a:off x="4611566" y="4509024"/>
-            <a:ext cx="642535" cy="301101"/>
-          </a:xfrm>
-          <a:prstGeom xmlns:a="http://schemas.openxmlformats.org/drawingml/2006/main" prst="straightConnector1">
-            <a:avLst/>
-          </a:prstGeom>
-          <a:ln xmlns:a="http://schemas.openxmlformats.org/drawingml/2006/main" w="19050">
-            <a:solidFill>
-              <a:srgbClr val="C9D5E3"/>
-            </a:solidFill>
-            <a:prstDash val="solid"/>
-          </a:ln>
-        </p:spPr>
-      </p:cxnSp>
-      <p:cxnSp>
-        <p:nvCxnSpPr>
-          <p:cNvPr id="36" name=""/>
-          <p:cNvCxnSpPr>
-            <a:stCxn xmlns:a="http://schemas.openxmlformats.org/drawingml/2006/main" id="3" idx="1"/>
-            <a:endCxn xmlns:a="http://schemas.openxmlformats.org/drawingml/2006/main" id="9" idx="6"/>
-          </p:cNvCxnSpPr>
-          <p:nvPr/>
-        </p:nvCxnSpPr>
-        <p:spPr>
-          <a:xfrm xmlns:a="http://schemas.openxmlformats.org/drawingml/2006/main" flipH="1" flipV="1">
-            <a:off x="4611566" y="2524125"/>
-            <a:ext cx="642535" cy="301101"/>
-          </a:xfrm>
-          <a:prstGeom xmlns:a="http://schemas.openxmlformats.org/drawingml/2006/main" prst="straightConnector1">
-            <a:avLst/>
-          </a:prstGeom>
-          <a:ln xmlns:a="http://schemas.openxmlformats.org/drawingml/2006/main" w="19050">
-            <a:solidFill>
-              <a:srgbClr val="C9D5E3"/>
-            </a:solidFill>
-            <a:prstDash val="solid"/>
-          </a:ln>
-        </p:spPr>
-      </p:cxnSp>
-      <p:sp>
-        <p:nvSpPr>
-          <p:cNvPr id="16" name="">
-            <a:extLst xmlns:a="http://schemas.openxmlformats.org/drawingml/2006/main">
-              <a:ext uri="{FF2B5EF4-FFF2-40B4-BE49-F238E27FC236}">
-                <a16:creationId xmlns:a16="http://schemas.microsoft.com/office/drawing/2014/main" id="{0734A85B-7B1D-4E21-94A8-6EE9F2CCF5A6}"/>
-              </a:ext>
-            </a:extLst>
-          </p:cNvPr>
-          <p:cNvSpPr>
-            <a:spLocks xmlns:a="http://schemas.openxmlformats.org/drawingml/2006/main" noGrp="1"/>
-          </p:cNvSpPr>
-          <p:nvPr/>
-        </p:nvSpPr>
-        <p:spPr>
-          <a:xfrm xmlns:a="http://schemas.openxmlformats.org/drawingml/2006/main">
-            <a:off x="5676900" y="962025"/>
-            <a:ext cx="838200" cy="838200"/>
-          </a:xfrm>
-          <a:prstGeom xmlns:a="http://schemas.openxmlformats.org/drawingml/2006/main" prst="rect">
-            <a:avLst/>
-          </a:prstGeom>
-          <a:noFill xmlns:a="http://schemas.openxmlformats.org/drawingml/2006/main"/>
-          <a:ln xmlns:a="http://schemas.openxmlformats.org/drawingml/2006/main" w="0">
-            <a:noFill/>
-            <a:prstDash val="solid"/>
-          </a:ln>
-        </p:spPr>
         <p:txBody>
           <a:bodyPr xmlns:a="http://schemas.openxmlformats.org/drawingml/2006/main" lIns="0" tIns="0" rIns="0" bIns="0" anchor="ctr">
             <a:normAutofit fontScale="100000"/>
@@ -1671,17 +1369,17 @@
                 <a:ea typeface="Microsoft YaHei"/>
                 <a:cs typeface="Microsoft YaHei"/>
               </a:rPr>
-              <a:t>方向一</a:t>
+              <a:t>01</a:t>
             </a:r>
           </a:p>
         </p:txBody>
       </p:sp>
       <p:sp>
         <p:nvSpPr>
-          <p:cNvPr id="17" name="">
+          <p:cNvPr id="7" name="">
             <a:extLst xmlns:a="http://schemas.openxmlformats.org/drawingml/2006/main">
               <a:ext uri="{FF2B5EF4-FFF2-40B4-BE49-F238E27FC236}">
-                <a16:creationId xmlns:a16="http://schemas.microsoft.com/office/drawing/2014/main" id="{E0321B53-BD55-4A53-B61A-7F530BCAB581}"/>
+                <a16:creationId xmlns:a16="http://schemas.microsoft.com/office/drawing/2014/main" id="{65DA0112-DD25-45EF-8464-003EB3B70CD4}"/>
               </a:ext>
             </a:extLst>
           </p:cNvPr>
@@ -1692,8 +1390,8 @@
         </p:nvSpPr>
         <p:spPr>
           <a:xfrm xmlns:a="http://schemas.openxmlformats.org/drawingml/2006/main">
-            <a:off x="7656634" y="2105025"/>
-            <a:ext cx="838200" cy="838200"/>
+            <a:off x="647700" y="2476500"/>
+            <a:ext cx="2857500" cy="285750"/>
           </a:xfrm>
           <a:prstGeom xmlns:a="http://schemas.openxmlformats.org/drawingml/2006/main" prst="rect">
             <a:avLst/>
@@ -1704,6 +1402,157 @@
             <a:prstDash val="solid"/>
           </a:ln>
         </p:spPr>
+        <p:txBody>
+          <a:bodyPr xmlns:a="http://schemas.openxmlformats.org/drawingml/2006/main" lIns="0" tIns="0" rIns="0" bIns="0" anchor="ctr">
+            <a:normAutofit fontScale="100000"/>
+          </a:bodyPr>
+          <a:lstStyle xmlns:a="http://schemas.openxmlformats.org/drawingml/2006/main"/>
+          <a:p xmlns:a="http://schemas.openxmlformats.org/drawingml/2006/main">
+            <a:pPr algn="r">
+              <a:defRPr sz="1425" b="1">
+                <a:solidFill>
+                  <a:srgbClr val="1677C8"/>
+                </a:solidFill>
+                <a:latin typeface="Microsoft YaHei"/>
+                <a:ea typeface="Microsoft YaHei"/>
+                <a:cs typeface="Microsoft YaHei"/>
+              </a:defRPr>
+            </a:pPr>
+            <a:r>
+              <a:rPr sz="1425" b="1">
+                <a:solidFill>
+                  <a:srgbClr val="1677C8"/>
+                </a:solidFill>
+                <a:latin typeface="Microsoft YaHei"/>
+                <a:ea typeface="Microsoft YaHei"/>
+                <a:cs typeface="Microsoft YaHei"/>
+              </a:rPr>
+              <a:t>统一标准</a:t>
+            </a:r>
+          </a:p>
+        </p:txBody>
+      </p:sp>
+      <p:sp>
+        <p:nvSpPr>
+          <p:cNvPr id="8" name="">
+            <a:extLst xmlns:a="http://schemas.openxmlformats.org/drawingml/2006/main">
+              <a:ext uri="{FF2B5EF4-FFF2-40B4-BE49-F238E27FC236}">
+                <a16:creationId xmlns:a16="http://schemas.microsoft.com/office/drawing/2014/main" id="{358A5FC8-4C77-48B3-B81D-2DF47E2B1090}"/>
+              </a:ext>
+            </a:extLst>
+          </p:cNvPr>
+          <p:cNvSpPr>
+            <a:spLocks xmlns:a="http://schemas.openxmlformats.org/drawingml/2006/main" noGrp="1"/>
+          </p:cNvSpPr>
+          <p:nvPr/>
+        </p:nvSpPr>
+        <p:spPr>
+          <a:xfrm xmlns:a="http://schemas.openxmlformats.org/drawingml/2006/main">
+            <a:off x="647700" y="2790825"/>
+            <a:ext cx="2857500" cy="447675"/>
+          </a:xfrm>
+          <a:prstGeom xmlns:a="http://schemas.openxmlformats.org/drawingml/2006/main" prst="rect">
+            <a:avLst/>
+          </a:prstGeom>
+          <a:noFill xmlns:a="http://schemas.openxmlformats.org/drawingml/2006/main"/>
+          <a:ln xmlns:a="http://schemas.openxmlformats.org/drawingml/2006/main" w="0">
+            <a:noFill/>
+            <a:prstDash val="solid"/>
+          </a:ln>
+        </p:spPr>
+        <p:txBody>
+          <a:bodyPr xmlns:a="http://schemas.openxmlformats.org/drawingml/2006/main" lIns="0" tIns="0" rIns="0" bIns="0" anchor="t">
+            <a:normAutofit fontScale="100000"/>
+          </a:bodyPr>
+          <a:lstStyle xmlns:a="http://schemas.openxmlformats.org/drawingml/2006/main"/>
+          <a:p xmlns:a="http://schemas.openxmlformats.org/drawingml/2006/main">
+            <a:pPr algn="r">
+              <a:defRPr sz="1200" b="0">
+                <a:solidFill>
+                  <a:srgbClr val="475569"/>
+                </a:solidFill>
+                <a:latin typeface="Microsoft YaHei"/>
+                <a:ea typeface="Microsoft YaHei"/>
+                <a:cs typeface="Microsoft YaHei"/>
+              </a:defRPr>
+            </a:pPr>
+            <a:r>
+              <a:rPr sz="1200" b="0">
+                <a:solidFill>
+                  <a:srgbClr val="475569"/>
+                </a:solidFill>
+                <a:latin typeface="Microsoft YaHei"/>
+                <a:ea typeface="Microsoft YaHei"/>
+                <a:cs typeface="Microsoft YaHei"/>
+              </a:rPr>
+              <a:t>将共同原则转成稳定、可执行的规则</a:t>
+            </a:r>
+          </a:p>
+        </p:txBody>
+      </p:sp>
+      <p:cxnSp>
+        <p:nvCxnSpPr>
+          <p:cNvPr id="30" name=""/>
+          <p:cNvCxnSpPr>
+            <a:stCxn xmlns:a="http://schemas.openxmlformats.org/drawingml/2006/main" id="5" idx="2"/>
+            <a:endCxn xmlns:a="http://schemas.openxmlformats.org/drawingml/2006/main" id="6" idx="6"/>
+          </p:cNvCxnSpPr>
+          <p:nvPr/>
+        </p:nvCxnSpPr>
+        <p:spPr>
+          <a:xfrm xmlns:a="http://schemas.openxmlformats.org/drawingml/2006/main" flipH="1" flipV="1">
+            <a:off x="4076700" y="2771775"/>
+            <a:ext cx="781050" cy="895350"/>
+          </a:xfrm>
+          <a:prstGeom xmlns:a="http://schemas.openxmlformats.org/drawingml/2006/main" prst="straightConnector1">
+            <a:avLst/>
+          </a:prstGeom>
+          <a:ln xmlns:a="http://schemas.openxmlformats.org/drawingml/2006/main" w="14288">
+            <a:solidFill>
+              <a:srgbClr val="B7CCE0"/>
+            </a:solidFill>
+            <a:prstDash val="solid"/>
+          </a:ln>
+        </p:spPr>
+      </p:cxnSp>
+      <p:sp>
+        <p:nvSpPr>
+          <p:cNvPr id="10" name="">
+            <a:extLst xmlns:a="http://schemas.openxmlformats.org/drawingml/2006/main">
+              <a:ext uri="{FF2B5EF4-FFF2-40B4-BE49-F238E27FC236}">
+                <a16:creationId xmlns:a16="http://schemas.microsoft.com/office/drawing/2014/main" id="{7112D6E5-24FA-464C-9338-A5033525458A}"/>
+              </a:ext>
+            </a:extLst>
+          </p:cNvPr>
+          <p:cNvSpPr>
+            <a:spLocks xmlns:a="http://schemas.openxmlformats.org/drawingml/2006/main" noGrp="1"/>
+          </p:cNvSpPr>
+          <p:nvPr/>
+        </p:nvSpPr>
+        <p:spPr>
+          <a:xfrm xmlns:a="http://schemas.openxmlformats.org/drawingml/2006/main">
+            <a:off x="3638550" y="3676650"/>
+            <a:ext cx="438150" cy="438150"/>
+          </a:xfrm>
+          <a:prstGeom xmlns:a="http://schemas.openxmlformats.org/drawingml/2006/main" prst="ellipse">
+            <a:avLst/>
+          </a:prstGeom>
+          <a:solidFill xmlns:a="http://schemas.openxmlformats.org/drawingml/2006/main">
+            <a:srgbClr val="00A8D8"/>
+          </a:solidFill>
+          <a:ln xmlns:a="http://schemas.openxmlformats.org/drawingml/2006/main" w="28575">
+            <a:solidFill>
+              <a:srgbClr val="FFFFFF"/>
+            </a:solidFill>
+            <a:prstDash val="solid"/>
+          </a:ln>
+        </p:spPr>
+        <p:style>
+          <a:lnRef xmlns:a="http://schemas.openxmlformats.org/drawingml/2006/main" idx="0"/>
+          <a:fillRef xmlns:a="http://schemas.openxmlformats.org/drawingml/2006/main" idx="0"/>
+          <a:effectRef xmlns:a="http://schemas.openxmlformats.org/drawingml/2006/main" idx="4"/>
+          <a:fontRef xmlns:a="http://schemas.openxmlformats.org/drawingml/2006/main" idx="major"/>
+        </p:style>
         <p:txBody>
           <a:bodyPr xmlns:a="http://schemas.openxmlformats.org/drawingml/2006/main" lIns="0" tIns="0" rIns="0" bIns="0" anchor="ctr">
             <a:normAutofit fontScale="100000"/>
@@ -1729,17 +1578,17 @@
                 <a:ea typeface="Microsoft YaHei"/>
                 <a:cs typeface="Microsoft YaHei"/>
               </a:rPr>
-              <a:t>方向二</a:t>
+              <a:t>02</a:t>
             </a:r>
           </a:p>
         </p:txBody>
       </p:sp>
       <p:sp>
         <p:nvSpPr>
-          <p:cNvPr id="18" name="">
+          <p:cNvPr id="11" name="">
             <a:extLst xmlns:a="http://schemas.openxmlformats.org/drawingml/2006/main">
               <a:ext uri="{FF2B5EF4-FFF2-40B4-BE49-F238E27FC236}">
-                <a16:creationId xmlns:a16="http://schemas.microsoft.com/office/drawing/2014/main" id="{90411F98-C14F-4077-AEE3-592E6FFAE920}"/>
+                <a16:creationId xmlns:a16="http://schemas.microsoft.com/office/drawing/2014/main" id="{A6B0D061-6A60-477D-8F3B-6072552649B6}"/>
               </a:ext>
             </a:extLst>
           </p:cNvPr>
@@ -1750,8 +1599,8 @@
         </p:nvSpPr>
         <p:spPr>
           <a:xfrm xmlns:a="http://schemas.openxmlformats.org/drawingml/2006/main">
-            <a:off x="7656634" y="4391025"/>
-            <a:ext cx="838200" cy="838200"/>
+            <a:off x="647700" y="3600450"/>
+            <a:ext cx="2857500" cy="285750"/>
           </a:xfrm>
           <a:prstGeom xmlns:a="http://schemas.openxmlformats.org/drawingml/2006/main" prst="rect">
             <a:avLst/>
@@ -1762,6 +1611,157 @@
             <a:prstDash val="solid"/>
           </a:ln>
         </p:spPr>
+        <p:txBody>
+          <a:bodyPr xmlns:a="http://schemas.openxmlformats.org/drawingml/2006/main" lIns="0" tIns="0" rIns="0" bIns="0" anchor="ctr">
+            <a:normAutofit fontScale="100000"/>
+          </a:bodyPr>
+          <a:lstStyle xmlns:a="http://schemas.openxmlformats.org/drawingml/2006/main"/>
+          <a:p xmlns:a="http://schemas.openxmlformats.org/drawingml/2006/main">
+            <a:pPr algn="r">
+              <a:defRPr sz="1425" b="1">
+                <a:solidFill>
+                  <a:srgbClr val="1677C8"/>
+                </a:solidFill>
+                <a:latin typeface="Microsoft YaHei"/>
+                <a:ea typeface="Microsoft YaHei"/>
+                <a:cs typeface="Microsoft YaHei"/>
+              </a:defRPr>
+            </a:pPr>
+            <a:r>
+              <a:rPr sz="1425" b="1">
+                <a:solidFill>
+                  <a:srgbClr val="1677C8"/>
+                </a:solidFill>
+                <a:latin typeface="Microsoft YaHei"/>
+                <a:ea typeface="Microsoft YaHei"/>
+                <a:cs typeface="Microsoft YaHei"/>
+              </a:rPr>
+              <a:t>快速响应</a:t>
+            </a:r>
+          </a:p>
+        </p:txBody>
+      </p:sp>
+      <p:sp>
+        <p:nvSpPr>
+          <p:cNvPr id="12" name="">
+            <a:extLst xmlns:a="http://schemas.openxmlformats.org/drawingml/2006/main">
+              <a:ext uri="{FF2B5EF4-FFF2-40B4-BE49-F238E27FC236}">
+                <a16:creationId xmlns:a16="http://schemas.microsoft.com/office/drawing/2014/main" id="{FB8DAFFD-43F4-44F0-9F04-06D6586893FB}"/>
+              </a:ext>
+            </a:extLst>
+          </p:cNvPr>
+          <p:cNvSpPr>
+            <a:spLocks xmlns:a="http://schemas.openxmlformats.org/drawingml/2006/main" noGrp="1"/>
+          </p:cNvSpPr>
+          <p:nvPr/>
+        </p:nvSpPr>
+        <p:spPr>
+          <a:xfrm xmlns:a="http://schemas.openxmlformats.org/drawingml/2006/main">
+            <a:off x="647700" y="3914775"/>
+            <a:ext cx="2857500" cy="447675"/>
+          </a:xfrm>
+          <a:prstGeom xmlns:a="http://schemas.openxmlformats.org/drawingml/2006/main" prst="rect">
+            <a:avLst/>
+          </a:prstGeom>
+          <a:noFill xmlns:a="http://schemas.openxmlformats.org/drawingml/2006/main"/>
+          <a:ln xmlns:a="http://schemas.openxmlformats.org/drawingml/2006/main" w="0">
+            <a:noFill/>
+            <a:prstDash val="solid"/>
+          </a:ln>
+        </p:spPr>
+        <p:txBody>
+          <a:bodyPr xmlns:a="http://schemas.openxmlformats.org/drawingml/2006/main" lIns="0" tIns="0" rIns="0" bIns="0" anchor="t">
+            <a:normAutofit fontScale="100000"/>
+          </a:bodyPr>
+          <a:lstStyle xmlns:a="http://schemas.openxmlformats.org/drawingml/2006/main"/>
+          <a:p xmlns:a="http://schemas.openxmlformats.org/drawingml/2006/main">
+            <a:pPr algn="r">
+              <a:defRPr sz="1200" b="0">
+                <a:solidFill>
+                  <a:srgbClr val="475569"/>
+                </a:solidFill>
+                <a:latin typeface="Microsoft YaHei"/>
+                <a:ea typeface="Microsoft YaHei"/>
+                <a:cs typeface="Microsoft YaHei"/>
+              </a:defRPr>
+            </a:pPr>
+            <a:r>
+              <a:rPr sz="1200" b="0">
+                <a:solidFill>
+                  <a:srgbClr val="475569"/>
+                </a:solidFill>
+                <a:latin typeface="Microsoft YaHei"/>
+                <a:ea typeface="Microsoft YaHei"/>
+                <a:cs typeface="Microsoft YaHei"/>
+              </a:rPr>
+              <a:t>减少重复判断，让常见需求直接复用</a:t>
+            </a:r>
+          </a:p>
+        </p:txBody>
+      </p:sp>
+      <p:cxnSp>
+        <p:nvCxnSpPr>
+          <p:cNvPr id="34" name=""/>
+          <p:cNvCxnSpPr>
+            <a:stCxn xmlns:a="http://schemas.openxmlformats.org/drawingml/2006/main" id="5" idx="2"/>
+            <a:endCxn xmlns:a="http://schemas.openxmlformats.org/drawingml/2006/main" id="10" idx="6"/>
+          </p:cNvCxnSpPr>
+          <p:nvPr/>
+        </p:nvCxnSpPr>
+        <p:spPr>
+          <a:xfrm xmlns:a="http://schemas.openxmlformats.org/drawingml/2006/main" flipH="1">
+            <a:off x="4076700" y="3667125"/>
+            <a:ext cx="781050" cy="228600"/>
+          </a:xfrm>
+          <a:prstGeom xmlns:a="http://schemas.openxmlformats.org/drawingml/2006/main" prst="straightConnector1">
+            <a:avLst/>
+          </a:prstGeom>
+          <a:ln xmlns:a="http://schemas.openxmlformats.org/drawingml/2006/main" w="14288">
+            <a:solidFill>
+              <a:srgbClr val="B7CCE0"/>
+            </a:solidFill>
+            <a:prstDash val="solid"/>
+          </a:ln>
+        </p:spPr>
+      </p:cxnSp>
+      <p:sp>
+        <p:nvSpPr>
+          <p:cNvPr id="14" name="">
+            <a:extLst xmlns:a="http://schemas.openxmlformats.org/drawingml/2006/main">
+              <a:ext uri="{FF2B5EF4-FFF2-40B4-BE49-F238E27FC236}">
+                <a16:creationId xmlns:a16="http://schemas.microsoft.com/office/drawing/2014/main" id="{745C93A2-15B6-4C55-A4E0-1C4B040E0D95}"/>
+              </a:ext>
+            </a:extLst>
+          </p:cNvPr>
+          <p:cNvSpPr>
+            <a:spLocks xmlns:a="http://schemas.openxmlformats.org/drawingml/2006/main" noGrp="1"/>
+          </p:cNvSpPr>
+          <p:nvPr/>
+        </p:nvSpPr>
+        <p:spPr>
+          <a:xfrm xmlns:a="http://schemas.openxmlformats.org/drawingml/2006/main">
+            <a:off x="8058150" y="2552700"/>
+            <a:ext cx="438150" cy="438150"/>
+          </a:xfrm>
+          <a:prstGeom xmlns:a="http://schemas.openxmlformats.org/drawingml/2006/main" prst="ellipse">
+            <a:avLst/>
+          </a:prstGeom>
+          <a:solidFill xmlns:a="http://schemas.openxmlformats.org/drawingml/2006/main">
+            <a:srgbClr val="14CBD1"/>
+          </a:solidFill>
+          <a:ln xmlns:a="http://schemas.openxmlformats.org/drawingml/2006/main" w="28575">
+            <a:solidFill>
+              <a:srgbClr val="FFFFFF"/>
+            </a:solidFill>
+            <a:prstDash val="solid"/>
+          </a:ln>
+        </p:spPr>
+        <p:style>
+          <a:lnRef xmlns:a="http://schemas.openxmlformats.org/drawingml/2006/main" idx="0"/>
+          <a:fillRef xmlns:a="http://schemas.openxmlformats.org/drawingml/2006/main" idx="0"/>
+          <a:effectRef xmlns:a="http://schemas.openxmlformats.org/drawingml/2006/main" idx="4"/>
+          <a:fontRef xmlns:a="http://schemas.openxmlformats.org/drawingml/2006/main" idx="major"/>
+        </p:style>
         <p:txBody>
           <a:bodyPr xmlns:a="http://schemas.openxmlformats.org/drawingml/2006/main" lIns="0" tIns="0" rIns="0" bIns="0" anchor="ctr">
             <a:normAutofit fontScale="100000"/>
@@ -1787,17 +1787,17 @@
                 <a:ea typeface="Microsoft YaHei"/>
                 <a:cs typeface="Microsoft YaHei"/>
               </a:rPr>
-              <a:t>方向三</a:t>
+              <a:t>03</a:t>
             </a:r>
           </a:p>
         </p:txBody>
       </p:sp>
       <p:sp>
         <p:nvSpPr>
-          <p:cNvPr id="19" name="">
+          <p:cNvPr id="15" name="">
             <a:extLst xmlns:a="http://schemas.openxmlformats.org/drawingml/2006/main">
               <a:ext uri="{FF2B5EF4-FFF2-40B4-BE49-F238E27FC236}">
-                <a16:creationId xmlns:a16="http://schemas.microsoft.com/office/drawing/2014/main" id="{29207FE4-FAE6-43B9-B105-EF64E301B8C2}"/>
+                <a16:creationId xmlns:a16="http://schemas.microsoft.com/office/drawing/2014/main" id="{E241BE3D-A2A0-4A79-B1FD-1A2FF9A3BF22}"/>
               </a:ext>
             </a:extLst>
           </p:cNvPr>
@@ -1808,8 +1808,8 @@
         </p:nvSpPr>
         <p:spPr>
           <a:xfrm xmlns:a="http://schemas.openxmlformats.org/drawingml/2006/main">
-            <a:off x="5676900" y="5534025"/>
-            <a:ext cx="838200" cy="838200"/>
+            <a:off x="8686800" y="2476500"/>
+            <a:ext cx="2857500" cy="285750"/>
           </a:xfrm>
           <a:prstGeom xmlns:a="http://schemas.openxmlformats.org/drawingml/2006/main" prst="rect">
             <a:avLst/>
@@ -1820,6 +1820,157 @@
             <a:prstDash val="solid"/>
           </a:ln>
         </p:spPr>
+        <p:txBody>
+          <a:bodyPr xmlns:a="http://schemas.openxmlformats.org/drawingml/2006/main" lIns="0" tIns="0" rIns="0" bIns="0" anchor="ctr">
+            <a:normAutofit fontScale="100000"/>
+          </a:bodyPr>
+          <a:lstStyle xmlns:a="http://schemas.openxmlformats.org/drawingml/2006/main"/>
+          <a:p xmlns:a="http://schemas.openxmlformats.org/drawingml/2006/main">
+            <a:pPr algn="l">
+              <a:defRPr sz="1425" b="1">
+                <a:solidFill>
+                  <a:srgbClr val="1677C8"/>
+                </a:solidFill>
+                <a:latin typeface="Microsoft YaHei"/>
+                <a:ea typeface="Microsoft YaHei"/>
+                <a:cs typeface="Microsoft YaHei"/>
+              </a:defRPr>
+            </a:pPr>
+            <a:r>
+              <a:rPr sz="1425" b="1">
+                <a:solidFill>
+                  <a:srgbClr val="1677C8"/>
+                </a:solidFill>
+                <a:latin typeface="Microsoft YaHei"/>
+                <a:ea typeface="Microsoft YaHei"/>
+                <a:cs typeface="Microsoft YaHei"/>
+              </a:rPr>
+              <a:t>质量可控</a:t>
+            </a:r>
+          </a:p>
+        </p:txBody>
+      </p:sp>
+      <p:sp>
+        <p:nvSpPr>
+          <p:cNvPr id="16" name="">
+            <a:extLst xmlns:a="http://schemas.openxmlformats.org/drawingml/2006/main">
+              <a:ext uri="{FF2B5EF4-FFF2-40B4-BE49-F238E27FC236}">
+                <a16:creationId xmlns:a16="http://schemas.microsoft.com/office/drawing/2014/main" id="{129109E5-A4CD-4F95-B61A-A7C271B1B932}"/>
+              </a:ext>
+            </a:extLst>
+          </p:cNvPr>
+          <p:cNvSpPr>
+            <a:spLocks xmlns:a="http://schemas.openxmlformats.org/drawingml/2006/main" noGrp="1"/>
+          </p:cNvSpPr>
+          <p:nvPr/>
+        </p:nvSpPr>
+        <p:spPr>
+          <a:xfrm xmlns:a="http://schemas.openxmlformats.org/drawingml/2006/main">
+            <a:off x="8686800" y="2790825"/>
+            <a:ext cx="2857500" cy="447675"/>
+          </a:xfrm>
+          <a:prstGeom xmlns:a="http://schemas.openxmlformats.org/drawingml/2006/main" prst="rect">
+            <a:avLst/>
+          </a:prstGeom>
+          <a:noFill xmlns:a="http://schemas.openxmlformats.org/drawingml/2006/main"/>
+          <a:ln xmlns:a="http://schemas.openxmlformats.org/drawingml/2006/main" w="0">
+            <a:noFill/>
+            <a:prstDash val="solid"/>
+          </a:ln>
+        </p:spPr>
+        <p:txBody>
+          <a:bodyPr xmlns:a="http://schemas.openxmlformats.org/drawingml/2006/main" lIns="0" tIns="0" rIns="0" bIns="0" anchor="t">
+            <a:normAutofit fontScale="100000"/>
+          </a:bodyPr>
+          <a:lstStyle xmlns:a="http://schemas.openxmlformats.org/drawingml/2006/main"/>
+          <a:p xmlns:a="http://schemas.openxmlformats.org/drawingml/2006/main">
+            <a:pPr algn="l">
+              <a:defRPr sz="1200" b="0">
+                <a:solidFill>
+                  <a:srgbClr val="475569"/>
+                </a:solidFill>
+                <a:latin typeface="Microsoft YaHei"/>
+                <a:ea typeface="Microsoft YaHei"/>
+                <a:cs typeface="Microsoft YaHei"/>
+              </a:defRPr>
+            </a:pPr>
+            <a:r>
+              <a:rPr sz="1200" b="0">
+                <a:solidFill>
+                  <a:srgbClr val="475569"/>
+                </a:solidFill>
+                <a:latin typeface="Microsoft YaHei"/>
+                <a:ea typeface="Microsoft YaHei"/>
+                <a:cs typeface="Microsoft YaHei"/>
+              </a:rPr>
+              <a:t>在交付之前识别容量和几何风险</a:t>
+            </a:r>
+          </a:p>
+        </p:txBody>
+      </p:sp>
+      <p:cxnSp>
+        <p:nvCxnSpPr>
+          <p:cNvPr id="38" name=""/>
+          <p:cNvCxnSpPr>
+            <a:stCxn xmlns:a="http://schemas.openxmlformats.org/drawingml/2006/main" id="5" idx="6"/>
+            <a:endCxn xmlns:a="http://schemas.openxmlformats.org/drawingml/2006/main" id="14" idx="2"/>
+          </p:cNvCxnSpPr>
+          <p:nvPr/>
+        </p:nvCxnSpPr>
+        <p:spPr>
+          <a:xfrm xmlns:a="http://schemas.openxmlformats.org/drawingml/2006/main" flipV="1">
+            <a:off x="7334250" y="2771775"/>
+            <a:ext cx="723900" cy="895350"/>
+          </a:xfrm>
+          <a:prstGeom xmlns:a="http://schemas.openxmlformats.org/drawingml/2006/main" prst="straightConnector1">
+            <a:avLst/>
+          </a:prstGeom>
+          <a:ln xmlns:a="http://schemas.openxmlformats.org/drawingml/2006/main" w="14288">
+            <a:solidFill>
+              <a:srgbClr val="B7CCE0"/>
+            </a:solidFill>
+            <a:prstDash val="solid"/>
+          </a:ln>
+        </p:spPr>
+      </p:cxnSp>
+      <p:sp>
+        <p:nvSpPr>
+          <p:cNvPr id="18" name="">
+            <a:extLst xmlns:a="http://schemas.openxmlformats.org/drawingml/2006/main">
+              <a:ext uri="{FF2B5EF4-FFF2-40B4-BE49-F238E27FC236}">
+                <a16:creationId xmlns:a16="http://schemas.microsoft.com/office/drawing/2014/main" id="{5BB4769B-C78F-4BD1-A325-3D75F3E0CEA7}"/>
+              </a:ext>
+            </a:extLst>
+          </p:cNvPr>
+          <p:cNvSpPr>
+            <a:spLocks xmlns:a="http://schemas.openxmlformats.org/drawingml/2006/main" noGrp="1"/>
+          </p:cNvSpPr>
+          <p:nvPr/>
+        </p:nvSpPr>
+        <p:spPr>
+          <a:xfrm xmlns:a="http://schemas.openxmlformats.org/drawingml/2006/main">
+            <a:off x="8058150" y="3676650"/>
+            <a:ext cx="438150" cy="438150"/>
+          </a:xfrm>
+          <a:prstGeom xmlns:a="http://schemas.openxmlformats.org/drawingml/2006/main" prst="ellipse">
+            <a:avLst/>
+          </a:prstGeom>
+          <a:solidFill xmlns:a="http://schemas.openxmlformats.org/drawingml/2006/main">
+            <a:srgbClr val="00A8D8"/>
+          </a:solidFill>
+          <a:ln xmlns:a="http://schemas.openxmlformats.org/drawingml/2006/main" w="28575">
+            <a:solidFill>
+              <a:srgbClr val="FFFFFF"/>
+            </a:solidFill>
+            <a:prstDash val="solid"/>
+          </a:ln>
+        </p:spPr>
+        <p:style>
+          <a:lnRef xmlns:a="http://schemas.openxmlformats.org/drawingml/2006/main" idx="0"/>
+          <a:fillRef xmlns:a="http://schemas.openxmlformats.org/drawingml/2006/main" idx="0"/>
+          <a:effectRef xmlns:a="http://schemas.openxmlformats.org/drawingml/2006/main" idx="4"/>
+          <a:fontRef xmlns:a="http://schemas.openxmlformats.org/drawingml/2006/main" idx="major"/>
+        </p:style>
         <p:txBody>
           <a:bodyPr xmlns:a="http://schemas.openxmlformats.org/drawingml/2006/main" lIns="0" tIns="0" rIns="0" bIns="0" anchor="ctr">
             <a:normAutofit fontScale="100000"/>
@@ -1845,17 +1996,17 @@
                 <a:ea typeface="Microsoft YaHei"/>
                 <a:cs typeface="Microsoft YaHei"/>
               </a:rPr>
-              <a:t>方向四</a:t>
+              <a:t>04</a:t>
             </a:r>
           </a:p>
         </p:txBody>
       </p:sp>
       <p:sp>
         <p:nvSpPr>
-          <p:cNvPr id="20" name="">
+          <p:cNvPr id="19" name="">
             <a:extLst xmlns:a="http://schemas.openxmlformats.org/drawingml/2006/main">
               <a:ext uri="{FF2B5EF4-FFF2-40B4-BE49-F238E27FC236}">
-                <a16:creationId xmlns:a16="http://schemas.microsoft.com/office/drawing/2014/main" id="{8812AA7B-86AF-45AE-8BAE-7DA9C52A4423}"/>
+                <a16:creationId xmlns:a16="http://schemas.microsoft.com/office/drawing/2014/main" id="{FA400263-F5CB-4B37-A7A4-DD600A8AE95D}"/>
               </a:ext>
             </a:extLst>
           </p:cNvPr>
@@ -1866,8 +2017,8 @@
         </p:nvSpPr>
         <p:spPr>
           <a:xfrm xmlns:a="http://schemas.openxmlformats.org/drawingml/2006/main">
-            <a:off x="3697166" y="4391025"/>
-            <a:ext cx="838200" cy="838200"/>
+            <a:off x="8686800" y="3600450"/>
+            <a:ext cx="2857500" cy="285750"/>
           </a:xfrm>
           <a:prstGeom xmlns:a="http://schemas.openxmlformats.org/drawingml/2006/main" prst="rect">
             <a:avLst/>
@@ -1884,10 +2035,10 @@
           </a:bodyPr>
           <a:lstStyle xmlns:a="http://schemas.openxmlformats.org/drawingml/2006/main"/>
           <a:p xmlns:a="http://schemas.openxmlformats.org/drawingml/2006/main">
-            <a:pPr algn="ctr">
-              <a:defRPr sz="1200" b="1">
-                <a:solidFill>
-                  <a:srgbClr val="FFFFFF"/>
+            <a:pPr algn="l">
+              <a:defRPr sz="1425" b="1">
+                <a:solidFill>
+                  <a:srgbClr val="1677C8"/>
                 </a:solidFill>
                 <a:latin typeface="Microsoft YaHei"/>
                 <a:ea typeface="Microsoft YaHei"/>
@@ -1895,25 +2046,25 @@
               </a:defRPr>
             </a:pPr>
             <a:r>
-              <a:rPr sz="1200" b="1">
-                <a:solidFill>
-                  <a:srgbClr val="FFFFFF"/>
+              <a:rPr sz="1425" b="1">
+                <a:solidFill>
+                  <a:srgbClr val="1677C8"/>
                 </a:solidFill>
                 <a:latin typeface="Microsoft YaHei"/>
                 <a:ea typeface="Microsoft YaHei"/>
                 <a:cs typeface="Microsoft YaHei"/>
               </a:rPr>
-              <a:t>方向五</a:t>
+              <a:t>持续积累</a:t>
             </a:r>
           </a:p>
         </p:txBody>
       </p:sp>
       <p:sp>
         <p:nvSpPr>
-          <p:cNvPr id="21" name="">
+          <p:cNvPr id="20" name="">
             <a:extLst xmlns:a="http://schemas.openxmlformats.org/drawingml/2006/main">
               <a:ext uri="{FF2B5EF4-FFF2-40B4-BE49-F238E27FC236}">
-                <a16:creationId xmlns:a16="http://schemas.microsoft.com/office/drawing/2014/main" id="{C08ED301-D0A9-44C4-814C-3178CCD61698}"/>
+                <a16:creationId xmlns:a16="http://schemas.microsoft.com/office/drawing/2014/main" id="{39FA5BD7-DA23-408A-807E-003288A688F4}"/>
               </a:ext>
             </a:extLst>
           </p:cNvPr>
@@ -1924,8 +2075,8 @@
         </p:nvSpPr>
         <p:spPr>
           <a:xfrm xmlns:a="http://schemas.openxmlformats.org/drawingml/2006/main">
-            <a:off x="3697166" y="2105025"/>
-            <a:ext cx="838200" cy="838200"/>
+            <a:off x="8686800" y="3914775"/>
+            <a:ext cx="2857500" cy="447675"/>
           </a:xfrm>
           <a:prstGeom xmlns:a="http://schemas.openxmlformats.org/drawingml/2006/main" prst="rect">
             <a:avLst/>
@@ -1937,15 +2088,15 @@
           </a:ln>
         </p:spPr>
         <p:txBody>
-          <a:bodyPr xmlns:a="http://schemas.openxmlformats.org/drawingml/2006/main" lIns="0" tIns="0" rIns="0" bIns="0" anchor="ctr">
+          <a:bodyPr xmlns:a="http://schemas.openxmlformats.org/drawingml/2006/main" lIns="0" tIns="0" rIns="0" bIns="0" anchor="t">
             <a:normAutofit fontScale="100000"/>
           </a:bodyPr>
           <a:lstStyle xmlns:a="http://schemas.openxmlformats.org/drawingml/2006/main"/>
           <a:p xmlns:a="http://schemas.openxmlformats.org/drawingml/2006/main">
-            <a:pPr algn="ctr">
-              <a:defRPr sz="1200" b="1">
-                <a:solidFill>
-                  <a:srgbClr val="FFFFFF"/>
+            <a:pPr algn="l">
+              <a:defRPr sz="1200" b="0">
+                <a:solidFill>
+                  <a:srgbClr val="475569"/>
                 </a:solidFill>
                 <a:latin typeface="Microsoft YaHei"/>
                 <a:ea typeface="Microsoft YaHei"/>
@@ -1953,23 +2104,48 @@
               </a:defRPr>
             </a:pPr>
             <a:r>
-              <a:rPr sz="1200" b="1">
-                <a:solidFill>
-                  <a:srgbClr val="FFFFFF"/>
+              <a:rPr sz="1200" b="0">
+                <a:solidFill>
+                  <a:srgbClr val="475569"/>
                 </a:solidFill>
                 <a:latin typeface="Microsoft YaHei"/>
                 <a:ea typeface="Microsoft YaHei"/>
                 <a:cs typeface="Microsoft YaHei"/>
               </a:rPr>
-              <a:t>方向六</a:t>
+              <a:t>把一次作品沉淀为下一次可调用能力</a:t>
             </a:r>
           </a:p>
         </p:txBody>
       </p:sp>
+      <p:cxnSp>
+        <p:nvCxnSpPr>
+          <p:cNvPr id="42" name=""/>
+          <p:cNvCxnSpPr>
+            <a:stCxn xmlns:a="http://schemas.openxmlformats.org/drawingml/2006/main" id="5" idx="6"/>
+            <a:endCxn xmlns:a="http://schemas.openxmlformats.org/drawingml/2006/main" id="18" idx="2"/>
+          </p:cNvCxnSpPr>
+          <p:nvPr/>
+        </p:nvCxnSpPr>
+        <p:spPr>
+          <a:xfrm xmlns:a="http://schemas.openxmlformats.org/drawingml/2006/main">
+            <a:off x="7334250" y="3667125"/>
+            <a:ext cx="723900" cy="228600"/>
+          </a:xfrm>
+          <a:prstGeom xmlns:a="http://schemas.openxmlformats.org/drawingml/2006/main" prst="straightConnector1">
+            <a:avLst/>
+          </a:prstGeom>
+          <a:ln xmlns:a="http://schemas.openxmlformats.org/drawingml/2006/main" w="14288">
+            <a:solidFill>
+              <a:srgbClr val="B7CCE0"/>
+            </a:solidFill>
+            <a:prstDash val="solid"/>
+          </a:ln>
+        </p:spPr>
+      </p:cxnSp>
     </p:spTree>
     <p:extLst>
       <p:ext uri="{BB962C8B-B14F-4D97-AF65-F5344CB8AC3E}">
-        <p14:creationId xmlns:p14="http://schemas.microsoft.com/office/powerpoint/2010/main" val="1161027679"/>
+        <p14:creationId xmlns:p14="http://schemas.microsoft.com/office/powerpoint/2010/main" val="66007201"/>
       </p:ext>
     </p:extLst>
   </p:cSld>
